--- a/skill-forks/scene-graph-ja/example/deck.pptx
+++ b/skill-forks/scene-graph-ja/example/deck.pptx
@@ -3190,7 +3190,7 @@
         </p:nvSpPr>
         <p:spPr>
           <a:xfrm>
-            <a:off x="612648" y="3840480"/>
+            <a:off x="612648" y="4206240"/>
             <a:ext cx="10966399" cy="1097280"/>
           </a:xfrm>
           <a:prstGeom prst="rect">
@@ -3234,7 +3234,7 @@
             <a:avLst/>
           </a:prstGeom>
           <a:solidFill>
-            <a:srgbClr val="F5A623"/>
+            <a:srgbClr val="5C4A3E"/>
           </a:solidFill>
           <a:ln>
             <a:noFill/>
@@ -3413,56 +3413,13 @@
       </p:sp>
       <p:sp>
         <p:nvSpPr>
-          <p:cNvPr id="2" name="Rectangle 1"/>
-          <p:cNvSpPr/>
-          <p:nvPr/>
-        </p:nvSpPr>
-        <p:spPr>
-          <a:xfrm>
-            <a:off x="0" y="0"/>
-            <a:ext cx="137160" cy="6858000"/>
-          </a:xfrm>
-          <a:prstGeom prst="rect">
-            <a:avLst/>
-          </a:prstGeom>
-          <a:solidFill>
-            <a:srgbClr val="E60012"/>
-          </a:solidFill>
-          <a:ln>
-            <a:noFill/>
-          </a:ln>
-        </p:spPr>
-        <p:style>
-          <a:lnRef idx="1">
-            <a:schemeClr val="accent1"/>
-          </a:lnRef>
-          <a:fillRef idx="3">
-            <a:schemeClr val="accent1"/>
-          </a:fillRef>
-          <a:effectRef idx="2">
-            <a:schemeClr val="accent1"/>
-          </a:effectRef>
-          <a:fontRef idx="minor">
-            <a:schemeClr val="lt1"/>
-          </a:fontRef>
-        </p:style>
-        <p:txBody>
-          <a:bodyPr rtlCol="0" anchor="ctr"/>
-          <a:lstStyle/>
-          <a:p>
-            <a:pPr algn="ctr"/>
-          </a:p>
-        </p:txBody>
-      </p:sp>
-      <p:sp>
-        <p:nvSpPr>
           <p:cNvPr id="3" name="TextBox 2"/>
           <p:cNvSpPr txBox="1"/>
           <p:nvPr/>
         </p:nvSpPr>
         <p:spPr>
           <a:xfrm>
-            <a:off x="1069848" y="1371600"/>
+            <a:off x="1069848" y="1051560"/>
             <a:ext cx="1828800" cy="1828800"/>
           </a:xfrm>
           <a:prstGeom prst="rect">
@@ -3499,7 +3456,7 @@
         </p:nvSpPr>
         <p:spPr>
           <a:xfrm>
-            <a:off x="1069848" y="2926080"/>
+            <a:off x="1069848" y="3429000"/>
             <a:ext cx="10966399" cy="1828800"/>
           </a:xfrm>
           <a:prstGeom prst="rect">
@@ -3679,49 +3636,6 @@
       </p:sp>
       <p:sp>
         <p:nvSpPr>
-          <p:cNvPr id="2" name="Rectangle 1"/>
-          <p:cNvSpPr/>
-          <p:nvPr/>
-        </p:nvSpPr>
-        <p:spPr>
-          <a:xfrm>
-            <a:off x="0" y="0"/>
-            <a:ext cx="91440" cy="6858000"/>
-          </a:xfrm>
-          <a:prstGeom prst="rect">
-            <a:avLst/>
-          </a:prstGeom>
-          <a:solidFill>
-            <a:srgbClr val="E60012"/>
-          </a:solidFill>
-          <a:ln>
-            <a:noFill/>
-          </a:ln>
-        </p:spPr>
-        <p:style>
-          <a:lnRef idx="1">
-            <a:schemeClr val="accent1"/>
-          </a:lnRef>
-          <a:fillRef idx="3">
-            <a:schemeClr val="accent1"/>
-          </a:fillRef>
-          <a:effectRef idx="2">
-            <a:schemeClr val="accent1"/>
-          </a:effectRef>
-          <a:fontRef idx="minor">
-            <a:schemeClr val="lt1"/>
-          </a:fontRef>
-        </p:style>
-        <p:txBody>
-          <a:bodyPr rtlCol="0" anchor="ctr"/>
-          <a:lstStyle/>
-          <a:p>
-            <a:pPr algn="ctr"/>
-          </a:p>
-        </p:txBody>
-      </p:sp>
-      <p:sp>
-        <p:nvSpPr>
           <p:cNvPr id="3" name="TextBox 2"/>
           <p:cNvSpPr txBox="1"/>
           <p:nvPr/>
@@ -3772,7 +3686,7 @@
             <a:avLst/>
           </a:prstGeom>
           <a:solidFill>
-            <a:srgbClr val="E60012"/>
+            <a:srgbClr val="1A3A7A"/>
           </a:solidFill>
           <a:ln>
             <a:noFill/>
@@ -4028,49 +3942,6 @@
       </p:sp>
       <p:sp>
         <p:nvSpPr>
-          <p:cNvPr id="2" name="Rectangle 1"/>
-          <p:cNvSpPr/>
-          <p:nvPr/>
-        </p:nvSpPr>
-        <p:spPr>
-          <a:xfrm>
-            <a:off x="0" y="0"/>
-            <a:ext cx="91440" cy="6858000"/>
-          </a:xfrm>
-          <a:prstGeom prst="rect">
-            <a:avLst/>
-          </a:prstGeom>
-          <a:solidFill>
-            <a:srgbClr val="E60012"/>
-          </a:solidFill>
-          <a:ln>
-            <a:noFill/>
-          </a:ln>
-        </p:spPr>
-        <p:style>
-          <a:lnRef idx="1">
-            <a:schemeClr val="accent1"/>
-          </a:lnRef>
-          <a:fillRef idx="3">
-            <a:schemeClr val="accent1"/>
-          </a:fillRef>
-          <a:effectRef idx="2">
-            <a:schemeClr val="accent1"/>
-          </a:effectRef>
-          <a:fontRef idx="minor">
-            <a:schemeClr val="lt1"/>
-          </a:fontRef>
-        </p:style>
-        <p:txBody>
-          <a:bodyPr rtlCol="0" anchor="ctr"/>
-          <a:lstStyle/>
-          <a:p>
-            <a:pPr algn="ctr"/>
-          </a:p>
-        </p:txBody>
-      </p:sp>
-      <p:sp>
-        <p:nvSpPr>
           <p:cNvPr id="3" name="TextBox 2"/>
           <p:cNvSpPr txBox="1"/>
           <p:nvPr/>
@@ -4121,7 +3992,7 @@
             <a:avLst/>
           </a:prstGeom>
           <a:solidFill>
-            <a:srgbClr val="E60012"/>
+            <a:srgbClr val="1A3A7A"/>
           </a:solidFill>
           <a:ln>
             <a:noFill/>
@@ -4377,49 +4248,6 @@
       </p:sp>
       <p:sp>
         <p:nvSpPr>
-          <p:cNvPr id="2" name="Rectangle 1"/>
-          <p:cNvSpPr/>
-          <p:nvPr/>
-        </p:nvSpPr>
-        <p:spPr>
-          <a:xfrm>
-            <a:off x="0" y="0"/>
-            <a:ext cx="91440" cy="6858000"/>
-          </a:xfrm>
-          <a:prstGeom prst="rect">
-            <a:avLst/>
-          </a:prstGeom>
-          <a:solidFill>
-            <a:srgbClr val="E60012"/>
-          </a:solidFill>
-          <a:ln>
-            <a:noFill/>
-          </a:ln>
-        </p:spPr>
-        <p:style>
-          <a:lnRef idx="1">
-            <a:schemeClr val="accent1"/>
-          </a:lnRef>
-          <a:fillRef idx="3">
-            <a:schemeClr val="accent1"/>
-          </a:fillRef>
-          <a:effectRef idx="2">
-            <a:schemeClr val="accent1"/>
-          </a:effectRef>
-          <a:fontRef idx="minor">
-            <a:schemeClr val="lt1"/>
-          </a:fontRef>
-        </p:style>
-        <p:txBody>
-          <a:bodyPr rtlCol="0" anchor="ctr"/>
-          <a:lstStyle/>
-          <a:p>
-            <a:pPr algn="ctr"/>
-          </a:p>
-        </p:txBody>
-      </p:sp>
-      <p:sp>
-        <p:nvSpPr>
           <p:cNvPr id="3" name="TextBox 2"/>
           <p:cNvSpPr txBox="1"/>
           <p:nvPr/>
@@ -4470,7 +4298,7 @@
             <a:avLst/>
           </a:prstGeom>
           <a:solidFill>
-            <a:srgbClr val="E60012"/>
+            <a:srgbClr val="1A3A7A"/>
           </a:solidFill>
           <a:ln>
             <a:noFill/>
